--- a/ppt/3. 부트 프로젝트 생성.pptx
+++ b/ppt/3. 부트 프로젝트 생성.pptx
@@ -9,6 +9,9 @@
     <p:sldId id="257" r:id="rId3"/>
     <p:sldId id="259" r:id="rId4"/>
     <p:sldId id="260" r:id="rId5"/>
+    <p:sldId id="262" r:id="rId6"/>
+    <p:sldId id="261" r:id="rId7"/>
+    <p:sldId id="263" r:id="rId8"/>
   </p:sldIdLst>
   <p:sldSz cx="12192000" cy="6858000"/>
   <p:notesSz cx="6858000" cy="9144000"/>
@@ -107,6 +110,11 @@
       </a:defRPr>
     </a:lvl9pPr>
   </p:defaultTextStyle>
+  <p:extLst>
+    <p:ext uri="{EFAFB233-063F-42B5-8137-9DF3F51BA10A}">
+      <p15:sldGuideLst xmlns:p15="http://schemas.microsoft.com/office/powerpoint/2012/main"/>
+    </p:ext>
+  </p:extLst>
 </p:presentation>
 </file>
 
@@ -4182,7 +4190,7 @@
         </p:nvGrpSpPr>
         <p:grpSpPr>
           <a:xfrm>
-            <a:off x="1190925" y="1840658"/>
+            <a:off x="567471" y="1761907"/>
             <a:ext cx="5620534" cy="1314633"/>
             <a:chOff x="1190925" y="1840658"/>
             <a:chExt cx="5620534" cy="1314633"/>
@@ -4285,7 +4293,7 @@
         </p:nvGrpSpPr>
         <p:grpSpPr>
           <a:xfrm>
-            <a:off x="1190925" y="3342108"/>
+            <a:off x="567471" y="3238810"/>
             <a:ext cx="5649113" cy="1895740"/>
             <a:chOff x="1190925" y="3342108"/>
             <a:chExt cx="5649113" cy="1895740"/>
@@ -4396,8 +4404,8 @@
         </p:blipFill>
         <p:spPr>
           <a:xfrm>
-            <a:off x="7114668" y="1840658"/>
-            <a:ext cx="4588881" cy="1153024"/>
+            <a:off x="6491214" y="1737360"/>
+            <a:ext cx="4939783" cy="1153024"/>
           </a:xfrm>
           <a:prstGeom prst="rect">
             <a:avLst/>
@@ -4426,8 +4434,8 @@
         </p:blipFill>
         <p:spPr>
           <a:xfrm>
-            <a:off x="7114667" y="3297841"/>
-            <a:ext cx="4588882" cy="656658"/>
+            <a:off x="6491211" y="3101421"/>
+            <a:ext cx="4939786" cy="694833"/>
           </a:xfrm>
           <a:prstGeom prst="rect">
             <a:avLst/>
@@ -4456,8 +4464,8 @@
         </p:blipFill>
         <p:spPr>
           <a:xfrm>
-            <a:off x="6371999" y="4116769"/>
-            <a:ext cx="5715798" cy="685896"/>
+            <a:off x="6491213" y="4013471"/>
+            <a:ext cx="4939786" cy="592775"/>
           </a:xfrm>
           <a:prstGeom prst="rect">
             <a:avLst/>
@@ -4486,8 +4494,8 @@
         </p:blipFill>
         <p:spPr>
           <a:xfrm>
-            <a:off x="6405341" y="4964935"/>
-            <a:ext cx="5649113" cy="1095528"/>
+            <a:off x="6491212" y="4861637"/>
+            <a:ext cx="4939787" cy="957969"/>
           </a:xfrm>
           <a:prstGeom prst="rect">
             <a:avLst/>
@@ -4516,14 +4524,99 @@
         </p:blipFill>
         <p:spPr>
           <a:xfrm>
-            <a:off x="916296" y="5056711"/>
-            <a:ext cx="5591955" cy="1514686"/>
+            <a:off x="567471" y="5224612"/>
+            <a:ext cx="5649113" cy="1514686"/>
           </a:xfrm>
           <a:prstGeom prst="rect">
             <a:avLst/>
           </a:prstGeom>
         </p:spPr>
       </p:pic>
+    </p:spTree>
+    <p:extLst>
+      <p:ext uri="{BB962C8B-B14F-4D97-AF65-F5344CB8AC3E}">
+        <p14:creationId xmlns:p14="http://schemas.microsoft.com/office/powerpoint/2010/main" val="698597800"/>
+      </p:ext>
+    </p:extLst>
+  </p:cSld>
+  <p:clrMapOvr>
+    <a:masterClrMapping/>
+  </p:clrMapOvr>
+</p:sld>
+</file>
+
+<file path=ppt/slides/slide5.xml><?xml version="1.0" encoding="utf-8"?>
+<p:sld xmlns:a="http://schemas.openxmlformats.org/drawingml/2006/main" xmlns:r="http://schemas.openxmlformats.org/officeDocument/2006/relationships" xmlns:p="http://schemas.openxmlformats.org/presentationml/2006/main">
+  <p:cSld>
+    <p:spTree>
+      <p:nvGrpSpPr>
+        <p:cNvPr id="1" name=""/>
+        <p:cNvGrpSpPr/>
+        <p:nvPr/>
+      </p:nvGrpSpPr>
+      <p:grpSpPr>
+        <a:xfrm>
+          <a:off x="0" y="0"/>
+          <a:ext cx="0" cy="0"/>
+          <a:chOff x="0" y="0"/>
+          <a:chExt cx="0" cy="0"/>
+        </a:xfrm>
+      </p:grpSpPr>
+      <p:sp>
+        <p:nvSpPr>
+          <p:cNvPr id="2" name="제목 1">
+            <a:extLst>
+              <a:ext uri="{FF2B5EF4-FFF2-40B4-BE49-F238E27FC236}">
+                <a16:creationId xmlns:a16="http://schemas.microsoft.com/office/drawing/2014/main" id="{0BAD3D0F-101E-11C3-8FEE-BD05D3A6E4AB}"/>
+              </a:ext>
+            </a:extLst>
+          </p:cNvPr>
+          <p:cNvSpPr>
+            <a:spLocks noGrp="1"/>
+          </p:cNvSpPr>
+          <p:nvPr>
+            <p:ph type="title"/>
+          </p:nvPr>
+        </p:nvSpPr>
+        <p:spPr/>
+        <p:txBody>
+          <a:bodyPr>
+            <a:normAutofit/>
+          </a:bodyPr>
+          <a:lstStyle/>
+          <a:p>
+            <a:r>
+              <a:rPr lang="en-US" altLang="ko-KR" sz="3600"/>
+              <a:t>VSCode</a:t>
+            </a:r>
+            <a:r>
+              <a:rPr lang="ko-KR" altLang="en-US" sz="3600"/>
+              <a:t>에서 </a:t>
+            </a:r>
+            <a:r>
+              <a:rPr lang="en-US" altLang="ko-KR" sz="3600"/>
+              <a:t>Spring Boot </a:t>
+            </a:r>
+            <a:r>
+              <a:rPr lang="ko-KR" altLang="en-US" sz="3600"/>
+              <a:t>프로젝트 생성</a:t>
+            </a:r>
+            <a:r>
+              <a:rPr lang="en-US" altLang="ko-KR" sz="3600"/>
+              <a:t>(</a:t>
+            </a:r>
+            <a:r>
+              <a:rPr lang="ko-KR" altLang="en-US" sz="3600"/>
+              <a:t>의존성</a:t>
+            </a:r>
+            <a:r>
+              <a:rPr lang="en-US" altLang="ko-KR" sz="3600"/>
+              <a:t>)</a:t>
+            </a:r>
+            <a:endParaRPr lang="ko-KR" altLang="en-US" sz="3600"/>
+          </a:p>
+        </p:txBody>
+      </p:sp>
       <p:pic>
         <p:nvPicPr>
           <p:cNvPr id="22" name="그림 21">
@@ -4539,14 +4632,14 @@
           <p:nvPr/>
         </p:nvPicPr>
         <p:blipFill>
-          <a:blip r:embed="rId9"/>
+          <a:blip r:embed="rId2"/>
           <a:stretch>
             <a:fillRect/>
           </a:stretch>
         </p:blipFill>
         <p:spPr>
           <a:xfrm>
-            <a:off x="3304785" y="2895525"/>
+            <a:off x="6126480" y="1817236"/>
             <a:ext cx="5582429" cy="1066949"/>
           </a:xfrm>
           <a:prstGeom prst="rect">
@@ -4569,14 +4662,14 @@
           <p:nvPr/>
         </p:nvPicPr>
         <p:blipFill>
-          <a:blip r:embed="rId10"/>
+          <a:blip r:embed="rId3"/>
           <a:stretch>
             <a:fillRect/>
           </a:stretch>
         </p:blipFill>
         <p:spPr>
           <a:xfrm>
-            <a:off x="3280968" y="4149291"/>
+            <a:off x="368246" y="1795376"/>
             <a:ext cx="5630061" cy="1181265"/>
           </a:xfrm>
           <a:prstGeom prst="rect">
@@ -4599,15 +4692,15 @@
           <p:nvPr/>
         </p:nvPicPr>
         <p:blipFill>
-          <a:blip r:embed="rId11"/>
+          <a:blip r:embed="rId4"/>
           <a:stretch>
             <a:fillRect/>
           </a:stretch>
         </p:blipFill>
         <p:spPr>
           <a:xfrm>
-            <a:off x="4587373" y="1815370"/>
-            <a:ext cx="5544324" cy="1028844"/>
+            <a:off x="368246" y="5234096"/>
+            <a:ext cx="5630060" cy="1028844"/>
           </a:xfrm>
           <a:prstGeom prst="rect">
             <a:avLst/>
@@ -4629,15 +4722,15 @@
           <p:nvPr/>
         </p:nvPicPr>
         <p:blipFill>
-          <a:blip r:embed="rId12"/>
+          <a:blip r:embed="rId5"/>
           <a:stretch>
             <a:fillRect/>
           </a:stretch>
         </p:blipFill>
         <p:spPr>
           <a:xfrm>
-            <a:off x="5343739" y="5814054"/>
-            <a:ext cx="5611008" cy="971686"/>
+            <a:off x="368246" y="4148955"/>
+            <a:ext cx="5630060" cy="971686"/>
           </a:xfrm>
           <a:prstGeom prst="rect">
             <a:avLst/>
@@ -4659,14 +4752,14 @@
           <p:nvPr/>
         </p:nvPicPr>
         <p:blipFill>
-          <a:blip r:embed="rId13"/>
+          <a:blip r:embed="rId6"/>
           <a:stretch>
             <a:fillRect/>
           </a:stretch>
         </p:blipFill>
         <p:spPr>
           <a:xfrm>
-            <a:off x="1494133" y="5550533"/>
+            <a:off x="377773" y="3042465"/>
             <a:ext cx="5620534" cy="1019317"/>
           </a:xfrm>
           <a:prstGeom prst="rect">
@@ -4689,14 +4782,14 @@
           <p:nvPr/>
         </p:nvPicPr>
         <p:blipFill>
-          <a:blip r:embed="rId14"/>
+          <a:blip r:embed="rId7"/>
           <a:stretch>
             <a:fillRect/>
           </a:stretch>
         </p:blipFill>
         <p:spPr>
           <a:xfrm>
-            <a:off x="3304785" y="4225995"/>
+            <a:off x="6126480" y="3024848"/>
             <a:ext cx="5715798" cy="1124107"/>
           </a:xfrm>
           <a:prstGeom prst="rect">
@@ -4704,12 +4797,74 @@
           </a:prstGeom>
         </p:spPr>
       </p:pic>
+    </p:spTree>
+    <p:extLst>
+      <p:ext uri="{BB962C8B-B14F-4D97-AF65-F5344CB8AC3E}">
+        <p14:creationId xmlns:p14="http://schemas.microsoft.com/office/powerpoint/2010/main" val="758564887"/>
+      </p:ext>
+    </p:extLst>
+  </p:cSld>
+  <p:clrMapOvr>
+    <a:masterClrMapping/>
+  </p:clrMapOvr>
+</p:sld>
+</file>
+
+<file path=ppt/slides/slide6.xml><?xml version="1.0" encoding="utf-8"?>
+<p:sld xmlns:a="http://schemas.openxmlformats.org/drawingml/2006/main" xmlns:r="http://schemas.openxmlformats.org/officeDocument/2006/relationships" xmlns:p="http://schemas.openxmlformats.org/presentationml/2006/main">
+  <p:cSld>
+    <p:spTree>
+      <p:nvGrpSpPr>
+        <p:cNvPr id="1" name=""/>
+        <p:cNvGrpSpPr/>
+        <p:nvPr/>
+      </p:nvGrpSpPr>
+      <p:grpSpPr>
+        <a:xfrm>
+          <a:off x="0" y="0"/>
+          <a:ext cx="0" cy="0"/>
+          <a:chOff x="0" y="0"/>
+          <a:chExt cx="0" cy="0"/>
+        </a:xfrm>
+      </p:grpSpPr>
+      <p:sp>
+        <p:nvSpPr>
+          <p:cNvPr id="2" name="제목 1">
+            <a:extLst>
+              <a:ext uri="{FF2B5EF4-FFF2-40B4-BE49-F238E27FC236}">
+                <a16:creationId xmlns:a16="http://schemas.microsoft.com/office/drawing/2014/main" id="{44CD969C-1390-EA5C-EC59-066A1278ABF1}"/>
+              </a:ext>
+            </a:extLst>
+          </p:cNvPr>
+          <p:cNvSpPr>
+            <a:spLocks noGrp="1"/>
+          </p:cNvSpPr>
+          <p:nvPr>
+            <p:ph type="title"/>
+          </p:nvPr>
+        </p:nvSpPr>
+        <p:spPr/>
+        <p:txBody>
+          <a:bodyPr/>
+          <a:lstStyle/>
+          <a:p>
+            <a:r>
+              <a:rPr lang="en-US" altLang="ko-KR"/>
+              <a:t>VSCode</a:t>
+            </a:r>
+            <a:r>
+              <a:rPr lang="ko-KR" altLang="en-US"/>
+              <a:t>에 프로젝트 불러오기</a:t>
+            </a:r>
+          </a:p>
+        </p:txBody>
+      </p:sp>
       <p:pic>
         <p:nvPicPr>
-          <p:cNvPr id="34" name="그림 33">
+          <p:cNvPr id="4" name="그림 3">
             <a:extLst>
               <a:ext uri="{FF2B5EF4-FFF2-40B4-BE49-F238E27FC236}">
-                <a16:creationId xmlns:a16="http://schemas.microsoft.com/office/drawing/2014/main" id="{C5325C35-0695-B452-D575-B68C22134D6D}"/>
+                <a16:creationId xmlns:a16="http://schemas.microsoft.com/office/drawing/2014/main" id="{69D85CEA-2A32-E272-1075-27292978E4BB}"/>
               </a:ext>
             </a:extLst>
           </p:cNvPr>
@@ -4719,25 +4874,221 @@
           <p:nvPr/>
         </p:nvPicPr>
         <p:blipFill>
-          <a:blip r:embed="rId15"/>
+          <a:blip r:embed="rId2"/>
           <a:stretch>
             <a:fillRect/>
           </a:stretch>
         </p:blipFill>
         <p:spPr>
           <a:xfrm>
-            <a:off x="2718262" y="1394844"/>
-            <a:ext cx="8945877" cy="5387423"/>
+            <a:off x="1203117" y="1908948"/>
+            <a:ext cx="7125694" cy="1743318"/>
           </a:xfrm>
           <a:prstGeom prst="rect">
             <a:avLst/>
           </a:prstGeom>
+          <a:ln>
+            <a:solidFill>
+              <a:schemeClr val="tx1"/>
+            </a:solidFill>
+          </a:ln>
         </p:spPr>
       </p:pic>
     </p:spTree>
     <p:extLst>
       <p:ext uri="{BB962C8B-B14F-4D97-AF65-F5344CB8AC3E}">
-        <p14:creationId xmlns:p14="http://schemas.microsoft.com/office/powerpoint/2010/main" val="698597800"/>
+        <p14:creationId xmlns:p14="http://schemas.microsoft.com/office/powerpoint/2010/main" val="2613602548"/>
+      </p:ext>
+    </p:extLst>
+  </p:cSld>
+  <p:clrMapOvr>
+    <a:masterClrMapping/>
+  </p:clrMapOvr>
+</p:sld>
+</file>
+
+<file path=ppt/slides/slide7.xml><?xml version="1.0" encoding="utf-8"?>
+<p:sld xmlns:a="http://schemas.openxmlformats.org/drawingml/2006/main" xmlns:r="http://schemas.openxmlformats.org/officeDocument/2006/relationships" xmlns:p="http://schemas.openxmlformats.org/presentationml/2006/main">
+  <p:cSld>
+    <p:spTree>
+      <p:nvGrpSpPr>
+        <p:cNvPr id="1" name=""/>
+        <p:cNvGrpSpPr/>
+        <p:nvPr/>
+      </p:nvGrpSpPr>
+      <p:grpSpPr>
+        <a:xfrm>
+          <a:off x="0" y="0"/>
+          <a:ext cx="0" cy="0"/>
+          <a:chOff x="0" y="0"/>
+          <a:chExt cx="0" cy="0"/>
+        </a:xfrm>
+      </p:grpSpPr>
+      <p:sp>
+        <p:nvSpPr>
+          <p:cNvPr id="2" name="제목 1">
+            <a:extLst>
+              <a:ext uri="{FF2B5EF4-FFF2-40B4-BE49-F238E27FC236}">
+                <a16:creationId xmlns:a16="http://schemas.microsoft.com/office/drawing/2014/main" id="{AEEFBC47-BF3A-C66B-5910-0279C02B25B9}"/>
+              </a:ext>
+            </a:extLst>
+          </p:cNvPr>
+          <p:cNvSpPr>
+            <a:spLocks noGrp="1"/>
+          </p:cNvSpPr>
+          <p:nvPr>
+            <p:ph type="title"/>
+          </p:nvPr>
+        </p:nvSpPr>
+        <p:spPr/>
+        <p:txBody>
+          <a:bodyPr/>
+          <a:lstStyle/>
+          <a:p>
+            <a:r>
+              <a:rPr lang="ko-KR" altLang="en-US"/>
+              <a:t>프로젝트 실행</a:t>
+            </a:r>
+          </a:p>
+        </p:txBody>
+      </p:sp>
+      <p:grpSp>
+        <p:nvGrpSpPr>
+          <p:cNvPr id="6" name="그룹 5">
+            <a:extLst>
+              <a:ext uri="{FF2B5EF4-FFF2-40B4-BE49-F238E27FC236}">
+                <a16:creationId xmlns:a16="http://schemas.microsoft.com/office/drawing/2014/main" id="{6D21AE04-13EB-2AE2-5CDE-D013EB0355AF}"/>
+              </a:ext>
+            </a:extLst>
+          </p:cNvPr>
+          <p:cNvGrpSpPr/>
+          <p:nvPr/>
+        </p:nvGrpSpPr>
+        <p:grpSpPr>
+          <a:xfrm>
+            <a:off x="1097280" y="1886989"/>
+            <a:ext cx="3153215" cy="2143424"/>
+            <a:chOff x="1097280" y="1886989"/>
+            <a:chExt cx="3153215" cy="2143424"/>
+          </a:xfrm>
+        </p:grpSpPr>
+        <p:pic>
+          <p:nvPicPr>
+            <p:cNvPr id="4" name="그림 3">
+              <a:extLst>
+                <a:ext uri="{FF2B5EF4-FFF2-40B4-BE49-F238E27FC236}">
+                  <a16:creationId xmlns:a16="http://schemas.microsoft.com/office/drawing/2014/main" id="{3D57EB94-BBC4-F4BD-A614-22D266EFBF23}"/>
+                </a:ext>
+              </a:extLst>
+            </p:cNvPr>
+            <p:cNvPicPr>
+              <a:picLocks noChangeAspect="1"/>
+            </p:cNvPicPr>
+            <p:nvPr/>
+          </p:nvPicPr>
+          <p:blipFill>
+            <a:blip r:embed="rId2"/>
+            <a:stretch>
+              <a:fillRect/>
+            </a:stretch>
+          </p:blipFill>
+          <p:spPr>
+            <a:xfrm>
+              <a:off x="1097280" y="1886989"/>
+              <a:ext cx="3153215" cy="2143424"/>
+            </a:xfrm>
+            <a:prstGeom prst="rect">
+              <a:avLst/>
+            </a:prstGeom>
+          </p:spPr>
+        </p:pic>
+        <p:sp>
+          <p:nvSpPr>
+            <p:cNvPr id="5" name="직사각형 4">
+              <a:extLst>
+                <a:ext uri="{FF2B5EF4-FFF2-40B4-BE49-F238E27FC236}">
+                  <a16:creationId xmlns:a16="http://schemas.microsoft.com/office/drawing/2014/main" id="{BAEEB940-C732-D169-4D24-E455CAF5280A}"/>
+                </a:ext>
+              </a:extLst>
+            </p:cNvPr>
+            <p:cNvSpPr/>
+            <p:nvPr/>
+          </p:nvSpPr>
+          <p:spPr>
+            <a:xfrm>
+              <a:off x="1097280" y="3491345"/>
+              <a:ext cx="423949" cy="432262"/>
+            </a:xfrm>
+            <a:prstGeom prst="rect">
+              <a:avLst/>
+            </a:prstGeom>
+            <a:noFill/>
+            <a:ln>
+              <a:solidFill>
+                <a:srgbClr val="FF0000"/>
+              </a:solidFill>
+            </a:ln>
+          </p:spPr>
+          <p:style>
+            <a:lnRef idx="2">
+              <a:schemeClr val="accent1">
+                <a:shade val="15000"/>
+              </a:schemeClr>
+            </a:lnRef>
+            <a:fillRef idx="1">
+              <a:schemeClr val="accent1"/>
+            </a:fillRef>
+            <a:effectRef idx="0">
+              <a:schemeClr val="accent1"/>
+            </a:effectRef>
+            <a:fontRef idx="minor">
+              <a:schemeClr val="lt1"/>
+            </a:fontRef>
+          </p:style>
+          <p:txBody>
+            <a:bodyPr rtlCol="0" anchor="ctr"/>
+            <a:lstStyle/>
+            <a:p>
+              <a:pPr algn="ctr"/>
+              <a:endParaRPr lang="ko-KR" altLang="en-US"/>
+            </a:p>
+          </p:txBody>
+        </p:sp>
+      </p:grpSp>
+      <p:pic>
+        <p:nvPicPr>
+          <p:cNvPr id="8" name="그림 7">
+            <a:extLst>
+              <a:ext uri="{FF2B5EF4-FFF2-40B4-BE49-F238E27FC236}">
+                <a16:creationId xmlns:a16="http://schemas.microsoft.com/office/drawing/2014/main" id="{F60F6A91-2B7B-076C-5D6E-5C981930B6B7}"/>
+              </a:ext>
+            </a:extLst>
+          </p:cNvPr>
+          <p:cNvPicPr>
+            <a:picLocks noChangeAspect="1"/>
+          </p:cNvPicPr>
+          <p:nvPr/>
+        </p:nvPicPr>
+        <p:blipFill>
+          <a:blip r:embed="rId3"/>
+          <a:stretch>
+            <a:fillRect/>
+          </a:stretch>
+        </p:blipFill>
+        <p:spPr>
+          <a:xfrm>
+            <a:off x="4405745" y="1886989"/>
+            <a:ext cx="7486743" cy="3296765"/>
+          </a:xfrm>
+          <a:prstGeom prst="rect">
+            <a:avLst/>
+          </a:prstGeom>
+        </p:spPr>
+      </p:pic>
+    </p:spTree>
+    <p:extLst>
+      <p:ext uri="{BB962C8B-B14F-4D97-AF65-F5344CB8AC3E}">
+        <p14:creationId xmlns:p14="http://schemas.microsoft.com/office/powerpoint/2010/main" val="2825755053"/>
       </p:ext>
     </p:extLst>
   </p:cSld>
